--- a/5th sem/ComputerNetwork/Chapter new 4.pptx
+++ b/5th sem/ComputerNetwork/Chapter new 4.pptx
@@ -85,7 +85,7 @@
         <p:spPr>
           <a:xfrm>
             <a:off x="838080" y="365040"/>
-            <a:ext cx="10514880" cy="1324800"/>
+            <a:ext cx="10514520" cy="1324440"/>
           </a:xfrm>
           <a:prstGeom prst="rect">
             <a:avLst/>
@@ -125,7 +125,7 @@
         <p:spPr>
           <a:xfrm>
             <a:off x="838080" y="1825560"/>
-            <a:ext cx="10514880" cy="4350600"/>
+            <a:ext cx="10514520" cy="4350240"/>
           </a:xfrm>
           <a:prstGeom prst="rect">
             <a:avLst/>
@@ -186,7 +186,7 @@
         <p:txBody>
           <a:bodyPr/>
           <a:p>
-            <a:fld id="{E297A306-3DC6-47F2-9F71-0254D97F13E7}" type="slidenum">
+            <a:fld id="{16928329-A580-4810-A332-E083D7DCEB67}" type="slidenum">
               <a:t>&lt;#&gt;</a:t>
             </a:fld>
           </a:p>
@@ -269,7 +269,7 @@
         <p:txBody>
           <a:bodyPr/>
           <a:p>
-            <a:fld id="{4E64C1BC-B96B-45D3-A12D-47281A52D119}" type="slidenum">
+            <a:fld id="{ABA8AF2D-B557-481D-BFFE-F3097D8ED498}" type="slidenum">
               <a:t>&lt;#&gt;</a:t>
             </a:fld>
           </a:p>
@@ -352,7 +352,7 @@
         <p:txBody>
           <a:bodyPr/>
           <a:p>
-            <a:fld id="{37CD086E-4339-4EEB-9C0F-A84999D32ACE}" type="slidenum">
+            <a:fld id="{CE6CF548-0044-459A-94E6-4FF7C713BF32}" type="slidenum">
               <a:t>&lt;#&gt;</a:t>
             </a:fld>
           </a:p>
@@ -435,7 +435,7 @@
         <p:txBody>
           <a:bodyPr/>
           <a:p>
-            <a:fld id="{4830DFD8-F811-4862-B1F2-3D0413BB3249}" type="slidenum">
+            <a:fld id="{667D193B-3B7B-4A71-B17E-F3C51FFD7964}" type="slidenum">
               <a:t>&lt;#&gt;</a:t>
             </a:fld>
           </a:p>
@@ -518,7 +518,7 @@
         <p:txBody>
           <a:bodyPr/>
           <a:p>
-            <a:fld id="{07081DF2-124E-4579-93E5-3E64764E31A3}" type="slidenum">
+            <a:fld id="{5AD9D238-0DEE-489F-A65C-5A720CC91DAD}" type="slidenum">
               <a:t>&lt;#&gt;</a:t>
             </a:fld>
           </a:p>
@@ -580,7 +580,7 @@
         <p:spPr>
           <a:xfrm>
             <a:off x="838080" y="365040"/>
-            <a:ext cx="10514880" cy="1324800"/>
+            <a:ext cx="10514520" cy="1324440"/>
           </a:xfrm>
           <a:prstGeom prst="rect">
             <a:avLst/>
@@ -620,7 +620,7 @@
         <p:spPr>
           <a:xfrm>
             <a:off x="838080" y="1825560"/>
-            <a:ext cx="10514880" cy="4350600"/>
+            <a:ext cx="10514520" cy="4350240"/>
           </a:xfrm>
           <a:prstGeom prst="rect">
             <a:avLst/>
@@ -684,7 +684,7 @@
         <p:txBody>
           <a:bodyPr/>
           <a:p>
-            <a:fld id="{2351484F-C14E-4976-827A-14F4DF2E6437}" type="slidenum">
+            <a:fld id="{14FF51EB-F3E0-448E-838A-8123ABF208D7}" type="slidenum">
               <a:t>&lt;#&gt;</a:t>
             </a:fld>
           </a:p>
@@ -767,7 +767,7 @@
         <p:txBody>
           <a:bodyPr/>
           <a:p>
-            <a:fld id="{275459B3-4CC2-4EDD-B0F1-55FC99B2FE8E}" type="slidenum">
+            <a:fld id="{5AB98D3D-B78A-457F-9D98-C085B9FECF57}" type="slidenum">
               <a:t>&lt;#&gt;</a:t>
             </a:fld>
           </a:p>
@@ -829,7 +829,7 @@
         <p:spPr>
           <a:xfrm>
             <a:off x="838080" y="365040"/>
-            <a:ext cx="10514880" cy="1324800"/>
+            <a:ext cx="10514520" cy="1324440"/>
           </a:xfrm>
           <a:prstGeom prst="rect">
             <a:avLst/>
@@ -869,7 +869,7 @@
         <p:spPr>
           <a:xfrm>
             <a:off x="838080" y="1825560"/>
-            <a:ext cx="5131080" cy="4350600"/>
+            <a:ext cx="5131080" cy="4350240"/>
           </a:xfrm>
           <a:prstGeom prst="rect">
             <a:avLst/>
@@ -912,7 +912,7 @@
         <p:spPr>
           <a:xfrm>
             <a:off x="6226200" y="1825560"/>
-            <a:ext cx="5131080" cy="4350600"/>
+            <a:ext cx="5131080" cy="4350240"/>
           </a:xfrm>
           <a:prstGeom prst="rect">
             <a:avLst/>
@@ -976,7 +976,7 @@
         <p:txBody>
           <a:bodyPr/>
           <a:p>
-            <a:fld id="{1B455D13-C03A-464E-B946-2C8CB6F8B310}" type="slidenum">
+            <a:fld id="{6B892D2A-97F8-401F-95CF-05386863E9D8}" type="slidenum">
               <a:t>&lt;#&gt;</a:t>
             </a:fld>
           </a:p>
@@ -1059,7 +1059,7 @@
         <p:txBody>
           <a:bodyPr/>
           <a:p>
-            <a:fld id="{1B7D39AA-DE8D-42C0-9A9A-F75DC56A246C}" type="slidenum">
+            <a:fld id="{75631224-6C34-41A2-AE6A-3B6CA21D42F0}" type="slidenum">
               <a:t>&lt;#&gt;</a:t>
             </a:fld>
           </a:p>
@@ -1121,7 +1121,7 @@
         <p:spPr>
           <a:xfrm>
             <a:off x="838080" y="365040"/>
-            <a:ext cx="10514880" cy="1324800"/>
+            <a:ext cx="10514520" cy="1324440"/>
           </a:xfrm>
           <a:prstGeom prst="rect">
             <a:avLst/>
@@ -1182,7 +1182,7 @@
         <p:txBody>
           <a:bodyPr/>
           <a:p>
-            <a:fld id="{B3B76BEB-AFFA-4DF7-8CD9-FF65B6240B39}" type="slidenum">
+            <a:fld id="{72F7753E-C1D4-4462-B097-32AC2F8F318B}" type="slidenum">
               <a:t>&lt;#&gt;</a:t>
             </a:fld>
           </a:p>
@@ -1265,7 +1265,7 @@
         <p:txBody>
           <a:bodyPr/>
           <a:p>
-            <a:fld id="{E2AB43EA-ED38-46D3-8A75-2A7E7609E303}" type="slidenum">
+            <a:fld id="{7221490E-1C26-4D07-AA3D-0D5F38ED1484}" type="slidenum">
               <a:t>&lt;#&gt;</a:t>
             </a:fld>
           </a:p>
@@ -1334,7 +1334,7 @@
         <p:spPr>
           <a:xfrm>
             <a:off x="838080" y="365040"/>
-            <a:ext cx="10514880" cy="1324800"/>
+            <a:ext cx="10514520" cy="1324440"/>
           </a:xfrm>
           <a:prstGeom prst="rect">
             <a:avLst/>
@@ -1383,7 +1383,7 @@
         <p:spPr>
           <a:xfrm>
             <a:off x="4038480" y="6356520"/>
-            <a:ext cx="4114080" cy="364320"/>
+            <a:ext cx="4113720" cy="363960"/>
           </a:xfrm>
           <a:prstGeom prst="rect">
             <a:avLst/>
@@ -1431,7 +1431,7 @@
                 </a:solidFill>
                 <a:latin typeface="Times New Roman"/>
               </a:rPr>
-              <a:t> </a:t>
+              <a:t>&lt;footer&gt;</a:t>
             </a:r>
             <a:endParaRPr b="0" lang="en-US" sz="1400" spc="-1" strike="noStrike">
               <a:solidFill>
@@ -1455,7 +1455,7 @@
         <p:spPr>
           <a:xfrm>
             <a:off x="8610480" y="6356520"/>
-            <a:ext cx="2742480" cy="364320"/>
+            <a:ext cx="2742120" cy="363960"/>
           </a:xfrm>
           <a:prstGeom prst="rect">
             <a:avLst/>
@@ -1498,7 +1498,7 @@
                 <a:tab algn="l" pos="0"/>
               </a:tabLst>
             </a:pPr>
-            <a:fld id="{4EE723D3-4490-4557-9416-B961460814D8}" type="slidenum">
+            <a:fld id="{2E94F6DD-812E-45AA-9713-7714BA2B0800}" type="slidenum">
               <a:rPr b="0" lang="en-US" sz="1200" spc="-1" strike="noStrike">
                 <a:solidFill>
                   <a:schemeClr val="dk1">
@@ -1507,7 +1507,7 @@
                 </a:solidFill>
                 <a:latin typeface="Calibri"/>
               </a:rPr>
-              <a:t>34</a:t>
+              <a:t>&lt;number&gt;</a:t>
             </a:fld>
             <a:endParaRPr b="0" lang="en-US" sz="1200" spc="-1" strike="noStrike">
               <a:solidFill>
@@ -1531,7 +1531,7 @@
         <p:spPr>
           <a:xfrm>
             <a:off x="838080" y="6356520"/>
-            <a:ext cx="2742480" cy="364320"/>
+            <a:ext cx="2742120" cy="363960"/>
           </a:xfrm>
           <a:prstGeom prst="rect">
             <a:avLst/>
@@ -1567,7 +1567,7 @@
                 </a:solidFill>
                 <a:latin typeface="Times New Roman"/>
               </a:rPr>
-              <a:t> </a:t>
+              <a:t>&lt;date/time&gt;</a:t>
             </a:r>
             <a:endParaRPr b="0" lang="en-US" sz="1400" spc="-1" strike="noStrike">
               <a:solidFill>
@@ -1624,7 +1624,7 @@
         <p:spPr>
           <a:xfrm>
             <a:off x="4038480" y="6356520"/>
-            <a:ext cx="4114080" cy="364320"/>
+            <a:ext cx="4113720" cy="363960"/>
           </a:xfrm>
           <a:prstGeom prst="rect">
             <a:avLst/>
@@ -1696,7 +1696,7 @@
         <p:spPr>
           <a:xfrm>
             <a:off x="8610480" y="6356520"/>
-            <a:ext cx="2742480" cy="364320"/>
+            <a:ext cx="2742120" cy="363960"/>
           </a:xfrm>
           <a:prstGeom prst="rect">
             <a:avLst/>
@@ -1739,7 +1739,7 @@
                 <a:tab algn="l" pos="0"/>
               </a:tabLst>
             </a:pPr>
-            <a:fld id="{36CD70D0-36A7-422D-9985-97923AF8D0E4}" type="slidenum">
+            <a:fld id="{D7FD2528-2E0A-475D-A2FB-3799C20BC4F3}" type="slidenum">
               <a:rPr b="0" lang="en-US" sz="1200" spc="-1" strike="noStrike">
                 <a:solidFill>
                   <a:schemeClr val="dk1">
@@ -1772,7 +1772,7 @@
         <p:spPr>
           <a:xfrm>
             <a:off x="838080" y="6356520"/>
-            <a:ext cx="2742480" cy="364320"/>
+            <a:ext cx="2742120" cy="363960"/>
           </a:xfrm>
           <a:prstGeom prst="rect">
             <a:avLst/>
@@ -1865,7 +1865,7 @@
         <p:spPr>
           <a:xfrm>
             <a:off x="4038480" y="6356520"/>
-            <a:ext cx="4114080" cy="364320"/>
+            <a:ext cx="4113720" cy="363960"/>
           </a:xfrm>
           <a:prstGeom prst="rect">
             <a:avLst/>
@@ -1937,7 +1937,7 @@
         <p:spPr>
           <a:xfrm>
             <a:off x="8610480" y="6356520"/>
-            <a:ext cx="2742480" cy="364320"/>
+            <a:ext cx="2742120" cy="363960"/>
           </a:xfrm>
           <a:prstGeom prst="rect">
             <a:avLst/>
@@ -1980,7 +1980,7 @@
                 <a:tab algn="l" pos="0"/>
               </a:tabLst>
             </a:pPr>
-            <a:fld id="{D4805F42-DCDE-462B-B873-543CB06BA1FA}" type="slidenum">
+            <a:fld id="{1F103964-140B-465A-A93E-CCFC797ABA6A}" type="slidenum">
               <a:rPr b="0" lang="en-US" sz="1200" spc="-1" strike="noStrike">
                 <a:solidFill>
                   <a:schemeClr val="dk1">
@@ -2013,7 +2013,7 @@
         <p:spPr>
           <a:xfrm>
             <a:off x="838080" y="6356520"/>
-            <a:ext cx="2742480" cy="364320"/>
+            <a:ext cx="2742120" cy="363960"/>
           </a:xfrm>
           <a:prstGeom prst="rect">
             <a:avLst/>
@@ -2106,7 +2106,7 @@
         <p:spPr>
           <a:xfrm>
             <a:off x="4038480" y="6356520"/>
-            <a:ext cx="4114080" cy="364320"/>
+            <a:ext cx="4113720" cy="363960"/>
           </a:xfrm>
           <a:prstGeom prst="rect">
             <a:avLst/>
@@ -2178,7 +2178,7 @@
         <p:spPr>
           <a:xfrm>
             <a:off x="8610480" y="6356520"/>
-            <a:ext cx="2742480" cy="364320"/>
+            <a:ext cx="2742120" cy="363960"/>
           </a:xfrm>
           <a:prstGeom prst="rect">
             <a:avLst/>
@@ -2221,7 +2221,7 @@
                 <a:tab algn="l" pos="0"/>
               </a:tabLst>
             </a:pPr>
-            <a:fld id="{0E024FD0-63C4-4677-A986-83F0ADD98A15}" type="slidenum">
+            <a:fld id="{6D8FDD5D-510D-48EC-9D62-EF37FEDDA7B3}" type="slidenum">
               <a:rPr b="0" lang="en-US" sz="1200" spc="-1" strike="noStrike">
                 <a:solidFill>
                   <a:schemeClr val="dk1">
@@ -2254,7 +2254,7 @@
         <p:spPr>
           <a:xfrm>
             <a:off x="838080" y="6356520"/>
-            <a:ext cx="2742480" cy="364320"/>
+            <a:ext cx="2742120" cy="363960"/>
           </a:xfrm>
           <a:prstGeom prst="rect">
             <a:avLst/>
@@ -2347,7 +2347,7 @@
         <p:spPr>
           <a:xfrm>
             <a:off x="4038480" y="6356520"/>
-            <a:ext cx="4114080" cy="364320"/>
+            <a:ext cx="4113720" cy="363960"/>
           </a:xfrm>
           <a:prstGeom prst="rect">
             <a:avLst/>
@@ -2419,7 +2419,7 @@
         <p:spPr>
           <a:xfrm>
             <a:off x="8610480" y="6356520"/>
-            <a:ext cx="2742480" cy="364320"/>
+            <a:ext cx="2742120" cy="363960"/>
           </a:xfrm>
           <a:prstGeom prst="rect">
             <a:avLst/>
@@ -2462,7 +2462,7 @@
                 <a:tab algn="l" pos="0"/>
               </a:tabLst>
             </a:pPr>
-            <a:fld id="{1549CCEB-2029-4B04-9BBC-F0D6F2157FC1}" type="slidenum">
+            <a:fld id="{D11658D5-40CA-4DB3-88DD-7200D8AD13E7}" type="slidenum">
               <a:rPr b="0" lang="en-US" sz="1200" spc="-1" strike="noStrike">
                 <a:solidFill>
                   <a:schemeClr val="dk1">
@@ -2495,7 +2495,7 @@
         <p:spPr>
           <a:xfrm>
             <a:off x="838080" y="6356520"/>
-            <a:ext cx="2742480" cy="364320"/>
+            <a:ext cx="2742120" cy="363960"/>
           </a:xfrm>
           <a:prstGeom prst="rect">
             <a:avLst/>
@@ -2588,7 +2588,7 @@
         <p:spPr>
           <a:xfrm>
             <a:off x="838080" y="365040"/>
-            <a:ext cx="10514880" cy="1324800"/>
+            <a:ext cx="10514520" cy="1324440"/>
           </a:xfrm>
           <a:prstGeom prst="rect">
             <a:avLst/>
@@ -2637,7 +2637,7 @@
         <p:spPr>
           <a:xfrm>
             <a:off x="838080" y="1825560"/>
-            <a:ext cx="10514880" cy="4350600"/>
+            <a:ext cx="10514520" cy="4350240"/>
           </a:xfrm>
           <a:prstGeom prst="rect">
             <a:avLst/>
@@ -2862,7 +2862,7 @@
         <p:spPr>
           <a:xfrm>
             <a:off x="4038480" y="6356520"/>
-            <a:ext cx="4114080" cy="364320"/>
+            <a:ext cx="4113720" cy="363960"/>
           </a:xfrm>
           <a:prstGeom prst="rect">
             <a:avLst/>
@@ -2934,7 +2934,7 @@
         <p:spPr>
           <a:xfrm>
             <a:off x="8610480" y="6356520"/>
-            <a:ext cx="2742480" cy="364320"/>
+            <a:ext cx="2742120" cy="363960"/>
           </a:xfrm>
           <a:prstGeom prst="rect">
             <a:avLst/>
@@ -2977,7 +2977,7 @@
                 <a:tab algn="l" pos="0"/>
               </a:tabLst>
             </a:pPr>
-            <a:fld id="{CCA7ACCB-9182-4380-9B00-73CA651DF4A2}" type="slidenum">
+            <a:fld id="{EBDA5713-46FA-4657-97CE-74F1F1FC0346}" type="slidenum">
               <a:rPr b="0" lang="en-US" sz="1200" spc="-1" strike="noStrike">
                 <a:solidFill>
                   <a:schemeClr val="dk1">
@@ -3010,7 +3010,7 @@
         <p:spPr>
           <a:xfrm>
             <a:off x="838080" y="6356520"/>
-            <a:ext cx="2742480" cy="364320"/>
+            <a:ext cx="2742120" cy="363960"/>
           </a:xfrm>
           <a:prstGeom prst="rect">
             <a:avLst/>
@@ -3103,7 +3103,7 @@
         <p:spPr>
           <a:xfrm>
             <a:off x="4038480" y="6356520"/>
-            <a:ext cx="4114080" cy="364320"/>
+            <a:ext cx="4113720" cy="363960"/>
           </a:xfrm>
           <a:prstGeom prst="rect">
             <a:avLst/>
@@ -3175,7 +3175,7 @@
         <p:spPr>
           <a:xfrm>
             <a:off x="8610480" y="6356520"/>
-            <a:ext cx="2742480" cy="364320"/>
+            <a:ext cx="2742120" cy="363960"/>
           </a:xfrm>
           <a:prstGeom prst="rect">
             <a:avLst/>
@@ -3218,7 +3218,7 @@
                 <a:tab algn="l" pos="0"/>
               </a:tabLst>
             </a:pPr>
-            <a:fld id="{03363CBB-716C-4DF3-82D0-C962AB9CE030}" type="slidenum">
+            <a:fld id="{F3CA6FA7-771A-4246-83BA-3B4BCA766EA4}" type="slidenum">
               <a:rPr b="0" lang="en-US" sz="1200" spc="-1" strike="noStrike">
                 <a:solidFill>
                   <a:schemeClr val="dk1">
@@ -3251,7 +3251,7 @@
         <p:spPr>
           <a:xfrm>
             <a:off x="838080" y="6356520"/>
-            <a:ext cx="2742480" cy="364320"/>
+            <a:ext cx="2742120" cy="363960"/>
           </a:xfrm>
           <a:prstGeom prst="rect">
             <a:avLst/>
@@ -3344,7 +3344,7 @@
         <p:spPr>
           <a:xfrm>
             <a:off x="838080" y="365040"/>
-            <a:ext cx="10514880" cy="1324800"/>
+            <a:ext cx="10514520" cy="1324440"/>
           </a:xfrm>
           <a:prstGeom prst="rect">
             <a:avLst/>
@@ -3393,7 +3393,7 @@
         <p:spPr>
           <a:xfrm>
             <a:off x="838080" y="1825560"/>
-            <a:ext cx="5130720" cy="4350600"/>
+            <a:ext cx="5130720" cy="4350240"/>
           </a:xfrm>
           <a:prstGeom prst="rect">
             <a:avLst/>
@@ -3618,7 +3618,7 @@
         <p:spPr>
           <a:xfrm>
             <a:off x="6226200" y="1825560"/>
-            <a:ext cx="5130720" cy="4350600"/>
+            <a:ext cx="5130720" cy="4350240"/>
           </a:xfrm>
           <a:prstGeom prst="rect">
             <a:avLst/>
@@ -3843,7 +3843,7 @@
         <p:spPr>
           <a:xfrm>
             <a:off x="4038480" y="6356520"/>
-            <a:ext cx="4114080" cy="364320"/>
+            <a:ext cx="4113720" cy="363960"/>
           </a:xfrm>
           <a:prstGeom prst="rect">
             <a:avLst/>
@@ -3915,7 +3915,7 @@
         <p:spPr>
           <a:xfrm>
             <a:off x="8610480" y="6356520"/>
-            <a:ext cx="2742480" cy="364320"/>
+            <a:ext cx="2742120" cy="363960"/>
           </a:xfrm>
           <a:prstGeom prst="rect">
             <a:avLst/>
@@ -3958,7 +3958,7 @@
                 <a:tab algn="l" pos="0"/>
               </a:tabLst>
             </a:pPr>
-            <a:fld id="{03928983-F66A-45AF-A5BD-0F9C96BC64B8}" type="slidenum">
+            <a:fld id="{9FB6FAF7-F2C0-4E70-9054-B8C9762E3C5E}" type="slidenum">
               <a:rPr b="0" lang="en-US" sz="1200" spc="-1" strike="noStrike">
                 <a:solidFill>
                   <a:schemeClr val="dk1">
@@ -3991,7 +3991,7 @@
         <p:spPr>
           <a:xfrm>
             <a:off x="838080" y="6356520"/>
-            <a:ext cx="2742480" cy="364320"/>
+            <a:ext cx="2742120" cy="363960"/>
           </a:xfrm>
           <a:prstGeom prst="rect">
             <a:avLst/>
@@ -4084,7 +4084,7 @@
         <p:spPr>
           <a:xfrm>
             <a:off x="4038480" y="6356520"/>
-            <a:ext cx="4114080" cy="364320"/>
+            <a:ext cx="4113720" cy="363960"/>
           </a:xfrm>
           <a:prstGeom prst="rect">
             <a:avLst/>
@@ -4156,7 +4156,7 @@
         <p:spPr>
           <a:xfrm>
             <a:off x="8610480" y="6356520"/>
-            <a:ext cx="2742480" cy="364320"/>
+            <a:ext cx="2742120" cy="363960"/>
           </a:xfrm>
           <a:prstGeom prst="rect">
             <a:avLst/>
@@ -4199,7 +4199,7 @@
                 <a:tab algn="l" pos="0"/>
               </a:tabLst>
             </a:pPr>
-            <a:fld id="{45A27C16-3795-4512-A141-FD420B746C9F}" type="slidenum">
+            <a:fld id="{54FCE7D4-222C-42A0-A096-79FA3A18CD4C}" type="slidenum">
               <a:rPr b="0" lang="en-US" sz="1200" spc="-1" strike="noStrike">
                 <a:solidFill>
                   <a:schemeClr val="dk1">
@@ -4232,7 +4232,7 @@
         <p:spPr>
           <a:xfrm>
             <a:off x="838080" y="6356520"/>
-            <a:ext cx="2742480" cy="364320"/>
+            <a:ext cx="2742120" cy="363960"/>
           </a:xfrm>
           <a:prstGeom prst="rect">
             <a:avLst/>
@@ -4325,7 +4325,7 @@
         <p:spPr>
           <a:xfrm>
             <a:off x="838080" y="365040"/>
-            <a:ext cx="10514880" cy="1324800"/>
+            <a:ext cx="10514520" cy="1324440"/>
           </a:xfrm>
           <a:prstGeom prst="rect">
             <a:avLst/>
@@ -4374,7 +4374,7 @@
         <p:spPr>
           <a:xfrm>
             <a:off x="4038480" y="6356520"/>
-            <a:ext cx="4114080" cy="364320"/>
+            <a:ext cx="4113720" cy="363960"/>
           </a:xfrm>
           <a:prstGeom prst="rect">
             <a:avLst/>
@@ -4446,7 +4446,7 @@
         <p:spPr>
           <a:xfrm>
             <a:off x="8610480" y="6356520"/>
-            <a:ext cx="2742480" cy="364320"/>
+            <a:ext cx="2742120" cy="363960"/>
           </a:xfrm>
           <a:prstGeom prst="rect">
             <a:avLst/>
@@ -4489,7 +4489,7 @@
                 <a:tab algn="l" pos="0"/>
               </a:tabLst>
             </a:pPr>
-            <a:fld id="{698971B4-59F0-411D-97E5-EBE45935BAAF}" type="slidenum">
+            <a:fld id="{72C419D5-66EE-47C3-BB0C-300118A20D68}" type="slidenum">
               <a:rPr b="0" lang="en-US" sz="1200" spc="-1" strike="noStrike">
                 <a:solidFill>
                   <a:schemeClr val="dk1">
@@ -4522,7 +4522,7 @@
         <p:spPr>
           <a:xfrm>
             <a:off x="838080" y="6356520"/>
-            <a:ext cx="2742480" cy="364320"/>
+            <a:ext cx="2742120" cy="363960"/>
           </a:xfrm>
           <a:prstGeom prst="rect">
             <a:avLst/>
@@ -4615,7 +4615,7 @@
         <p:spPr>
           <a:xfrm>
             <a:off x="4038480" y="6356520"/>
-            <a:ext cx="4114080" cy="364320"/>
+            <a:ext cx="4113720" cy="363960"/>
           </a:xfrm>
           <a:prstGeom prst="rect">
             <a:avLst/>
@@ -4687,7 +4687,7 @@
         <p:spPr>
           <a:xfrm>
             <a:off x="8610480" y="6356520"/>
-            <a:ext cx="2742480" cy="364320"/>
+            <a:ext cx="2742120" cy="363960"/>
           </a:xfrm>
           <a:prstGeom prst="rect">
             <a:avLst/>
@@ -4730,7 +4730,7 @@
                 <a:tab algn="l" pos="0"/>
               </a:tabLst>
             </a:pPr>
-            <a:fld id="{F84ED010-6719-4E06-A6FF-BB9AFCCBA517}" type="slidenum">
+            <a:fld id="{B2047610-03D4-455E-8132-0F5BFD758996}" type="slidenum">
               <a:rPr b="0" lang="en-US" sz="1200" spc="-1" strike="noStrike">
                 <a:solidFill>
                   <a:schemeClr val="dk1">
@@ -4763,7 +4763,7 @@
         <p:spPr>
           <a:xfrm>
             <a:off x="838080" y="6356520"/>
-            <a:ext cx="2742480" cy="364320"/>
+            <a:ext cx="2742120" cy="363960"/>
           </a:xfrm>
           <a:prstGeom prst="rect">
             <a:avLst/>
@@ -4849,7 +4849,7 @@
         <p:spPr>
           <a:xfrm>
             <a:off x="838080" y="365040"/>
-            <a:ext cx="10514880" cy="1596240"/>
+            <a:ext cx="10514520" cy="1595880"/>
           </a:xfrm>
           <a:prstGeom prst="rect">
             <a:avLst/>
@@ -4909,7 +4909,7 @@
         <p:spPr>
           <a:xfrm>
             <a:off x="771480" y="3345120"/>
-            <a:ext cx="10343520" cy="577440"/>
+            <a:ext cx="10343160" cy="577440"/>
           </a:xfrm>
           <a:prstGeom prst="rect">
             <a:avLst/>
@@ -4997,7 +4997,7 @@
         <p:spPr>
           <a:xfrm>
             <a:off x="0" y="0"/>
-            <a:ext cx="6019200" cy="6857280"/>
+            <a:ext cx="6018840" cy="6856920"/>
           </a:xfrm>
           <a:prstGeom prst="rect">
             <a:avLst/>
@@ -5166,7 +5166,7 @@
         <p:spPr>
           <a:xfrm>
             <a:off x="6172200" y="0"/>
-            <a:ext cx="6019200" cy="6857280"/>
+            <a:ext cx="6018840" cy="6856920"/>
           </a:xfrm>
           <a:prstGeom prst="rect">
             <a:avLst/>
@@ -5365,7 +5365,7 @@
         <p:spPr>
           <a:xfrm>
             <a:off x="0" y="0"/>
-            <a:ext cx="12191400" cy="6857280"/>
+            <a:ext cx="12191040" cy="6856920"/>
           </a:xfrm>
           <a:prstGeom prst="rect">
             <a:avLst/>
@@ -5518,7 +5518,7 @@
                 </a:solidFill>
                 <a:latin typeface="Calibri"/>
               </a:rPr>
-              <a:t>Suppose, the N number of devices are connected with each other in a mesh topology, the total number of ports that are required by each device is N−1N−1.</a:t>
+              <a:t>Suppose, the N number of devices are connected with each other in a mesh topology, the total number of ports that are required by each device is N−1</a:t>
             </a:r>
             <a:endParaRPr b="0" lang="en-US" sz="2800" spc="-1" strike="noStrike">
               <a:solidFill>
@@ -5560,7 +5560,7 @@
                 </a:solidFill>
                 <a:latin typeface="Calibri"/>
               </a:rPr>
-              <a:t>In Figure , there are 6 devices connected to each other, hence the total number of ports required by each device is 5. The total number of ports required = N * (N-1)= N * (N-1).</a:t>
+              <a:t>In Figure , there are 6 devices connected to each other, hence the total number of ports required by each device is 5. The total number of ports required = N * (N-1)</a:t>
             </a:r>
             <a:endParaRPr b="0" lang="en-US" sz="2800" spc="-1" strike="noStrike">
               <a:solidFill>
@@ -5593,7 +5593,7 @@
                 </a:solidFill>
                 <a:latin typeface="Calibri"/>
               </a:rPr>
-              <a:t>Suppose, N number of devices are connected with each other in a mesh topology, then the total number of dedicated links required to connect them is NC2NC2​ i.e. N * (N-1)/2N * (N-1)/2. </a:t>
+              <a:t>Suppose, N number of devices are connected with each other in a mesh topology, then the total number of dedicated links required to connect them is   i.e. N * (N-1)/2 . </a:t>
             </a:r>
             <a:endParaRPr b="0" lang="en-US" sz="2800" spc="-1" strike="noStrike">
               <a:solidFill>
@@ -5626,7 +5626,7 @@
                 </a:solidFill>
                 <a:latin typeface="Calibri"/>
               </a:rPr>
-              <a:t>In Figure, there are 6 devices connected to each other, hence the total number of links required is 6 * 5/2 = 156 * 5/2 = 15. </a:t>
+              <a:t>In Figure, there are 6 devices connected to each other, hence the total number of links required is 6 * 5/2 = 15</a:t>
             </a:r>
             <a:endParaRPr b="0" lang="en-US" sz="2800" spc="-1" strike="noStrike">
               <a:solidFill>
@@ -5700,7 +5700,7 @@
         <p:spPr>
           <a:xfrm>
             <a:off x="459000" y="745560"/>
-            <a:ext cx="11039760" cy="5430960"/>
+            <a:ext cx="11039400" cy="5430600"/>
           </a:xfrm>
           <a:prstGeom prst="rect">
             <a:avLst/>
@@ -5753,7 +5753,7 @@
         <p:spPr>
           <a:xfrm>
             <a:off x="0" y="0"/>
-            <a:ext cx="6019200" cy="6857280"/>
+            <a:ext cx="6018840" cy="6856920"/>
           </a:xfrm>
           <a:prstGeom prst="rect">
             <a:avLst/>
@@ -5952,7 +5952,7 @@
         <p:spPr>
           <a:xfrm>
             <a:off x="6019920" y="0"/>
-            <a:ext cx="6171480" cy="6857280"/>
+            <a:ext cx="6171120" cy="6856920"/>
           </a:xfrm>
           <a:prstGeom prst="rect">
             <a:avLst/>
@@ -6151,7 +6151,7 @@
         <p:spPr>
           <a:xfrm>
             <a:off x="0" y="0"/>
-            <a:ext cx="6019200" cy="6857280"/>
+            <a:ext cx="6018840" cy="6856920"/>
           </a:xfrm>
           <a:prstGeom prst="rect">
             <a:avLst/>
@@ -6437,7 +6437,7 @@
         <p:spPr>
           <a:xfrm>
             <a:off x="6172200" y="1371600"/>
-            <a:ext cx="5180760" cy="3924360"/>
+            <a:ext cx="5180400" cy="3924000"/>
           </a:xfrm>
           <a:prstGeom prst="rect">
             <a:avLst/>
@@ -6490,7 +6490,7 @@
         <p:spPr>
           <a:xfrm>
             <a:off x="0" y="0"/>
-            <a:ext cx="6019200" cy="6857280"/>
+            <a:ext cx="6018840" cy="6856920"/>
           </a:xfrm>
           <a:prstGeom prst="rect">
             <a:avLst/>
@@ -6629,7 +6629,7 @@
         <p:spPr>
           <a:xfrm>
             <a:off x="6095880" y="0"/>
-            <a:ext cx="6019200" cy="6787800"/>
+            <a:ext cx="6018840" cy="6787440"/>
           </a:xfrm>
           <a:prstGeom prst="rect">
             <a:avLst/>
@@ -6828,7 +6828,7 @@
         <p:spPr>
           <a:xfrm>
             <a:off x="0" y="0"/>
-            <a:ext cx="12191400" cy="6857280"/>
+            <a:ext cx="12191040" cy="6856920"/>
           </a:xfrm>
           <a:prstGeom prst="rect">
             <a:avLst/>
@@ -7268,7 +7268,7 @@
         <p:spPr>
           <a:xfrm>
             <a:off x="326520" y="310320"/>
-            <a:ext cx="11189880" cy="5698080"/>
+            <a:ext cx="11189520" cy="5697720"/>
           </a:xfrm>
           <a:prstGeom prst="rect">
             <a:avLst/>
@@ -7321,7 +7321,7 @@
         <p:spPr>
           <a:xfrm>
             <a:off x="0" y="0"/>
-            <a:ext cx="6757920" cy="6857280"/>
+            <a:ext cx="6757560" cy="6856920"/>
           </a:xfrm>
           <a:prstGeom prst="rect">
             <a:avLst/>
@@ -7472,7 +7472,7 @@
         <p:spPr>
           <a:xfrm>
             <a:off x="7146360" y="1749240"/>
-            <a:ext cx="4312800" cy="3994920"/>
+            <a:ext cx="4312440" cy="3994560"/>
           </a:xfrm>
           <a:prstGeom prst="rect">
             <a:avLst/>
@@ -7525,7 +7525,7 @@
         <p:spPr>
           <a:xfrm>
             <a:off x="0" y="0"/>
-            <a:ext cx="6579000" cy="6857280"/>
+            <a:ext cx="6578640" cy="6856920"/>
           </a:xfrm>
           <a:prstGeom prst="rect">
             <a:avLst/>
@@ -7698,7 +7698,7 @@
         <p:spPr>
           <a:xfrm>
             <a:off x="6957360" y="1202760"/>
-            <a:ext cx="5234040" cy="4104000"/>
+            <a:ext cx="5233680" cy="4103640"/>
           </a:xfrm>
           <a:prstGeom prst="rect">
             <a:avLst/>
@@ -7751,7 +7751,7 @@
         <p:spPr>
           <a:xfrm>
             <a:off x="0" y="0"/>
-            <a:ext cx="12191400" cy="6857280"/>
+            <a:ext cx="12191040" cy="6856920"/>
           </a:xfrm>
           <a:prstGeom prst="rect">
             <a:avLst/>
@@ -8082,7 +8082,7 @@
         <p:spPr>
           <a:xfrm>
             <a:off x="0" y="0"/>
-            <a:ext cx="12117600" cy="6886080"/>
+            <a:ext cx="12117240" cy="6885720"/>
           </a:xfrm>
           <a:prstGeom prst="rect">
             <a:avLst/>
@@ -8260,7 +8260,7 @@
         <p:spPr>
           <a:xfrm>
             <a:off x="0" y="0"/>
-            <a:ext cx="6817680" cy="6857280"/>
+            <a:ext cx="6817320" cy="6856920"/>
           </a:xfrm>
           <a:prstGeom prst="rect">
             <a:avLst/>
@@ -8576,7 +8576,7 @@
         <p:spPr>
           <a:xfrm>
             <a:off x="6977160" y="1103400"/>
-            <a:ext cx="5088240" cy="4114080"/>
+            <a:ext cx="5087880" cy="4113720"/>
           </a:xfrm>
           <a:prstGeom prst="rect">
             <a:avLst/>
@@ -8629,7 +8629,7 @@
         <p:spPr>
           <a:xfrm>
             <a:off x="0" y="0"/>
-            <a:ext cx="6019200" cy="6738120"/>
+            <a:ext cx="6018840" cy="6737760"/>
           </a:xfrm>
           <a:prstGeom prst="rect">
             <a:avLst/>
@@ -8837,7 +8837,7 @@
         <p:spPr>
           <a:xfrm>
             <a:off x="6609600" y="0"/>
-            <a:ext cx="5581800" cy="6857280"/>
+            <a:ext cx="5581440" cy="6856920"/>
           </a:xfrm>
           <a:prstGeom prst="rect">
             <a:avLst/>
@@ -9096,7 +9096,7 @@
         <p:spPr>
           <a:xfrm>
             <a:off x="0" y="0"/>
-            <a:ext cx="12191400" cy="6857280"/>
+            <a:ext cx="12191040" cy="6856920"/>
           </a:xfrm>
           <a:prstGeom prst="rect">
             <a:avLst/>
@@ -9346,7 +9346,7 @@
         <p:spPr>
           <a:xfrm>
             <a:off x="0" y="0"/>
-            <a:ext cx="7632360" cy="6857280"/>
+            <a:ext cx="7632000" cy="6856920"/>
           </a:xfrm>
           <a:prstGeom prst="rect">
             <a:avLst/>
@@ -9737,7 +9737,7 @@
         <p:spPr>
           <a:xfrm>
             <a:off x="7851960" y="1868400"/>
-            <a:ext cx="4339440" cy="3736440"/>
+            <a:ext cx="4339080" cy="3736080"/>
           </a:xfrm>
           <a:prstGeom prst="rect">
             <a:avLst/>
@@ -9790,7 +9790,7 @@
         <p:spPr>
           <a:xfrm>
             <a:off x="419040" y="99720"/>
-            <a:ext cx="11772360" cy="1162080"/>
+            <a:ext cx="11772000" cy="1161720"/>
           </a:xfrm>
           <a:prstGeom prst="rect">
             <a:avLst/>
@@ -9845,7 +9845,7 @@
         <p:spPr>
           <a:xfrm>
             <a:off x="0" y="1570320"/>
-            <a:ext cx="12191400" cy="5286960"/>
+            <a:ext cx="12191040" cy="5286600"/>
           </a:xfrm>
           <a:prstGeom prst="rect">
             <a:avLst/>
@@ -10073,7 +10073,7 @@
         <p:spPr>
           <a:xfrm>
             <a:off x="0" y="0"/>
-            <a:ext cx="12191400" cy="6777720"/>
+            <a:ext cx="12191040" cy="6777360"/>
           </a:xfrm>
           <a:prstGeom prst="rect">
             <a:avLst/>
@@ -10469,7 +10469,7 @@
         <p:spPr>
           <a:xfrm>
             <a:off x="0" y="0"/>
-            <a:ext cx="12191400" cy="6857280"/>
+            <a:ext cx="12191040" cy="6856920"/>
           </a:xfrm>
           <a:prstGeom prst="rect">
             <a:avLst/>
@@ -10770,7 +10770,7 @@
         <p:spPr>
           <a:xfrm>
             <a:off x="189000" y="0"/>
-            <a:ext cx="12002400" cy="1032840"/>
+            <a:ext cx="12002040" cy="1032480"/>
           </a:xfrm>
           <a:prstGeom prst="rect">
             <a:avLst/>
@@ -10825,7 +10825,7 @@
         <p:spPr>
           <a:xfrm>
             <a:off x="0" y="1302120"/>
-            <a:ext cx="12191400" cy="5555160"/>
+            <a:ext cx="12191040" cy="5554800"/>
           </a:xfrm>
           <a:prstGeom prst="rect">
             <a:avLst/>
@@ -10983,7 +10983,7 @@
         <p:spPr>
           <a:xfrm>
             <a:off x="0" y="0"/>
-            <a:ext cx="12191400" cy="6768000"/>
+            <a:ext cx="12191040" cy="6767640"/>
           </a:xfrm>
           <a:prstGeom prst="rect">
             <a:avLst/>
@@ -11394,7 +11394,7 @@
         <p:spPr>
           <a:xfrm>
             <a:off x="0" y="0"/>
-            <a:ext cx="12191400" cy="6857280"/>
+            <a:ext cx="12191040" cy="6856920"/>
           </a:xfrm>
           <a:prstGeom prst="rect">
             <a:avLst/>
@@ -11734,7 +11734,7 @@
         <p:spPr>
           <a:xfrm>
             <a:off x="0" y="69480"/>
-            <a:ext cx="12191400" cy="6787800"/>
+            <a:ext cx="12191040" cy="6787440"/>
           </a:xfrm>
           <a:prstGeom prst="rect">
             <a:avLst/>
@@ -12007,7 +12007,7 @@
         <p:spPr>
           <a:xfrm>
             <a:off x="0" y="0"/>
-            <a:ext cx="12191400" cy="6857280"/>
+            <a:ext cx="12191040" cy="6856920"/>
           </a:xfrm>
           <a:prstGeom prst="rect">
             <a:avLst/>
@@ -12386,7 +12386,7 @@
         <p:spPr>
           <a:xfrm>
             <a:off x="0" y="0"/>
-            <a:ext cx="12191400" cy="6857280"/>
+            <a:ext cx="12191040" cy="6856920"/>
           </a:xfrm>
           <a:prstGeom prst="rect">
             <a:avLst/>
@@ -12809,7 +12809,7 @@
         <p:spPr>
           <a:xfrm>
             <a:off x="0" y="0"/>
-            <a:ext cx="12095280" cy="6857280"/>
+            <a:ext cx="12094920" cy="6856920"/>
           </a:xfrm>
           <a:prstGeom prst="rect">
             <a:avLst/>
@@ -13154,7 +13154,7 @@
         <p:spPr>
           <a:xfrm>
             <a:off x="0" y="0"/>
-            <a:ext cx="12191400" cy="6857280"/>
+            <a:ext cx="12191040" cy="6856920"/>
           </a:xfrm>
           <a:prstGeom prst="rect">
             <a:avLst/>
@@ -13574,7 +13574,7 @@
         <p:spPr>
           <a:xfrm>
             <a:off x="23040" y="0"/>
-            <a:ext cx="6019200" cy="6857280"/>
+            <a:ext cx="6018840" cy="6856920"/>
           </a:xfrm>
           <a:prstGeom prst="rect">
             <a:avLst/>
@@ -13662,7 +13662,34 @@
                 </a:solidFill>
                 <a:latin typeface="Calibri"/>
               </a:rPr>
-              <a:t>Point-to-point topology is a type of topology that works on the functionality of the sender and receiver.</a:t>
+              <a:t>Point-to-point topology is a type of </a:t>
+            </a:r>
+            <a:r>
+              <a:rPr b="0" lang="en-US" sz="2800" spc="-1" strike="noStrike">
+                <a:solidFill>
+                  <a:schemeClr val="dk1"/>
+                </a:solidFill>
+                <a:latin typeface="Calibri"/>
+              </a:rPr>
+              <a:t>topology that works on the </a:t>
+            </a:r>
+            <a:r>
+              <a:rPr b="0" lang="en-US" sz="2800" spc="-1" strike="noStrike">
+                <a:solidFill>
+                  <a:schemeClr val="dk1"/>
+                </a:solidFill>
+                <a:latin typeface="Calibri"/>
+              </a:rPr>
+              <a:t>functionality of the sender and </a:t>
+            </a:r>
+            <a:r>
+              <a:rPr b="0" lang="en-US" sz="2800" spc="-1" strike="noStrike">
+                <a:solidFill>
+                  <a:schemeClr val="dk1"/>
+                </a:solidFill>
+                <a:latin typeface="Calibri"/>
+              </a:rPr>
+              <a:t>receiver.</a:t>
             </a:r>
             <a:endParaRPr b="0" lang="en-US" sz="2800" spc="-1" strike="noStrike">
               <a:solidFill>
@@ -13724,7 +13751,34 @@
                 </a:solidFill>
                 <a:latin typeface="Calibri"/>
               </a:rPr>
-              <a:t>It is the simplest communication between two nodes, in which one is the sender and the other one is the receiver. </a:t>
+              <a:t>It is the simplest communication </a:t>
+            </a:r>
+            <a:r>
+              <a:rPr b="0" lang="en-US" sz="2800" spc="-1" strike="noStrike">
+                <a:solidFill>
+                  <a:schemeClr val="dk1"/>
+                </a:solidFill>
+                <a:latin typeface="Calibri"/>
+              </a:rPr>
+              <a:t>between two nodes, in which one is </a:t>
+            </a:r>
+            <a:r>
+              <a:rPr b="0" lang="en-US" sz="2800" spc="-1" strike="noStrike">
+                <a:solidFill>
+                  <a:schemeClr val="dk1"/>
+                </a:solidFill>
+                <a:latin typeface="Calibri"/>
+              </a:rPr>
+              <a:t>the sender and the other one is the </a:t>
+            </a:r>
+            <a:r>
+              <a:rPr b="0" lang="en-US" sz="2800" spc="-1" strike="noStrike">
+                <a:solidFill>
+                  <a:schemeClr val="dk1"/>
+                </a:solidFill>
+                <a:latin typeface="Calibri"/>
+              </a:rPr>
+              <a:t>receiver. </a:t>
             </a:r>
             <a:endParaRPr b="0" lang="en-US" sz="2800" spc="-1" strike="noStrike">
               <a:solidFill>
@@ -13757,7 +13811,16 @@
                 </a:solidFill>
                 <a:latin typeface="Calibri"/>
               </a:rPr>
-              <a:t>Point-to-Point provides high bandwidth. </a:t>
+              <a:t>Point-to-Point provides high </a:t>
+            </a:r>
+            <a:r>
+              <a:rPr b="0" lang="en-US" sz="2800" spc="-1" strike="noStrike">
+                <a:solidFill>
+                  <a:schemeClr val="dk1"/>
+                </a:solidFill>
+                <a:latin typeface="Calibri"/>
+              </a:rPr>
+              <a:t>bandwidth. </a:t>
             </a:r>
             <a:endParaRPr b="0" lang="en-US" sz="2800" spc="-1" strike="noStrike">
               <a:solidFill>
@@ -13801,7 +13864,7 @@
         <p:spPr>
           <a:xfrm>
             <a:off x="6868080" y="1759320"/>
-            <a:ext cx="5108040" cy="3786120"/>
+            <a:ext cx="5107680" cy="3785760"/>
           </a:xfrm>
           <a:prstGeom prst="rect">
             <a:avLst/>
@@ -13854,7 +13917,7 @@
         <p:spPr>
           <a:xfrm>
             <a:off x="0" y="0"/>
-            <a:ext cx="6896880" cy="6857280"/>
+            <a:ext cx="6896520" cy="6856920"/>
           </a:xfrm>
           <a:prstGeom prst="rect">
             <a:avLst/>
@@ -14147,7 +14210,7 @@
         <p:spPr>
           <a:xfrm>
             <a:off x="7335000" y="1798920"/>
-            <a:ext cx="4017960" cy="3444840"/>
+            <a:ext cx="4017600" cy="3444480"/>
           </a:xfrm>
           <a:prstGeom prst="rect">
             <a:avLst/>
@@ -14200,7 +14263,7 @@
         <p:spPr>
           <a:xfrm>
             <a:off x="0" y="0"/>
-            <a:ext cx="6019200" cy="6717960"/>
+            <a:ext cx="6018840" cy="6717600"/>
           </a:xfrm>
           <a:prstGeom prst="rect">
             <a:avLst/>
@@ -14429,7 +14492,7 @@
         <p:spPr>
           <a:xfrm>
             <a:off x="6095880" y="69480"/>
-            <a:ext cx="6019200" cy="6648480"/>
+            <a:ext cx="6018840" cy="6648120"/>
           </a:xfrm>
           <a:prstGeom prst="rect">
             <a:avLst/>
@@ -14688,7 +14751,7 @@
         <p:spPr>
           <a:xfrm>
             <a:off x="0" y="0"/>
-            <a:ext cx="6479640" cy="6857280"/>
+            <a:ext cx="6479280" cy="6856920"/>
           </a:xfrm>
           <a:prstGeom prst="rect">
             <a:avLst/>
@@ -14916,7 +14979,7 @@
         <p:spPr>
           <a:xfrm>
             <a:off x="6738840" y="1689480"/>
-            <a:ext cx="5137920" cy="3587400"/>
+            <a:ext cx="5137560" cy="3587040"/>
           </a:xfrm>
           <a:prstGeom prst="rect">
             <a:avLst/>
@@ -14969,7 +15032,7 @@
         <p:spPr>
           <a:xfrm>
             <a:off x="0" y="0"/>
-            <a:ext cx="6082200" cy="6857280"/>
+            <a:ext cx="6081840" cy="6856920"/>
           </a:xfrm>
           <a:prstGeom prst="rect">
             <a:avLst/>
@@ -15138,7 +15201,7 @@
         <p:spPr>
           <a:xfrm>
             <a:off x="6311520" y="0"/>
-            <a:ext cx="5879880" cy="6857280"/>
+            <a:ext cx="5879520" cy="6856920"/>
           </a:xfrm>
           <a:prstGeom prst="rect">
             <a:avLst/>
@@ -15337,7 +15400,7 @@
         <p:spPr>
           <a:xfrm>
             <a:off x="0" y="0"/>
-            <a:ext cx="6817680" cy="6857280"/>
+            <a:ext cx="6817320" cy="6856920"/>
           </a:xfrm>
           <a:prstGeom prst="rect">
             <a:avLst/>
@@ -15576,7 +15639,7 @@
         <p:spPr>
           <a:xfrm>
             <a:off x="7036920" y="1719360"/>
-            <a:ext cx="4948920" cy="3576600"/>
+            <a:ext cx="4948560" cy="3576240"/>
           </a:xfrm>
           <a:prstGeom prst="rect">
             <a:avLst/>
